--- a/Song Template 3.pptx
+++ b/Song Template 3.pptx
@@ -3372,15 +3372,15 @@
           <a:p>
             <a:pPr algn="l"/>
             <a:r>
-              <a:rPr lang="en-US" sz="2800" b="1">
-                <a:latin typeface="Arial Bold" panose="020B0704020202020204" charset="0"/>
-                <a:cs typeface="Arial Bold" panose="020B0704020202020204" charset="0"/>
+              <a:rPr lang="en-US" sz="2800">
+                <a:latin typeface="Times New Roman Regular" panose="02020603050405020304" charset="0"/>
+                <a:cs typeface="Times New Roman Regular" panose="02020603050405020304" charset="0"/>
               </a:rPr>
               <a:t>[ TITLE ]</a:t>
             </a:r>
-            <a:endParaRPr lang="en-US" sz="2800" b="1">
-              <a:latin typeface="Arial Bold" panose="020B0704020202020204" charset="0"/>
-              <a:cs typeface="Arial Bold" panose="020B0704020202020204" charset="0"/>
+            <a:endParaRPr lang="en-US" sz="2800">
+              <a:latin typeface="Times New Roman Regular" panose="02020603050405020304" charset="0"/>
+              <a:cs typeface="Times New Roman Regular" panose="02020603050405020304" charset="0"/>
             </a:endParaRPr>
           </a:p>
         </p:txBody>
@@ -3409,14 +3409,14 @@
             </a:pPr>
             <a:r>
               <a:rPr lang="en-US">
-                <a:latin typeface="Arial Regular" panose="020B0704020202020204" charset="0"/>
-                <a:cs typeface="Arial Regular" panose="020B0704020202020204" charset="0"/>
+                <a:latin typeface="Times New Roman Regular" panose="02020603050405020304" charset="0"/>
+                <a:cs typeface="Times New Roman Regular" panose="02020603050405020304" charset="0"/>
               </a:rPr>
               <a:t>[LYRICS AND CHORDS]</a:t>
             </a:r>
             <a:endParaRPr lang="en-US">
-              <a:latin typeface="Arial Regular" panose="020B0704020202020204" charset="0"/>
-              <a:cs typeface="Arial Regular" panose="020B0704020202020204" charset="0"/>
+              <a:latin typeface="Times New Roman Regular" panose="02020603050405020304" charset="0"/>
+              <a:cs typeface="Times New Roman Regular" panose="02020603050405020304" charset="0"/>
             </a:endParaRPr>
           </a:p>
         </p:txBody>
@@ -3446,8 +3446,8 @@
                 <a:solidFill>
                   <a:schemeClr val="tx2"/>
                 </a:solidFill>
-                <a:latin typeface="Arial Regular" panose="020B0704020202020204" charset="0"/>
-                <a:cs typeface="Arial Regular" panose="020B0704020202020204" charset="0"/>
+                <a:latin typeface="Times New Roman Regular" panose="02020603050405020304" charset="0"/>
+                <a:cs typeface="Times New Roman Regular" panose="02020603050405020304" charset="0"/>
               </a:rPr>
               <a:t>[Copyright Info]</a:t>
             </a:r>
@@ -3455,8 +3455,8 @@
               <a:solidFill>
                 <a:schemeClr val="tx2"/>
               </a:solidFill>
-              <a:latin typeface="Arial Regular" panose="020B0704020202020204" charset="0"/>
-              <a:cs typeface="Arial Regular" panose="020B0704020202020204" charset="0"/>
+              <a:latin typeface="Times New Roman Regular" panose="02020603050405020304" charset="0"/>
+              <a:cs typeface="Times New Roman Regular" panose="02020603050405020304" charset="0"/>
             </a:endParaRPr>
           </a:p>
         </p:txBody>
